--- a/docs/latex/StablecoinArbitrage_GSS2026/presentation/slides_final.pptx
+++ b/docs/latex/StablecoinArbitrage_GSS2026/presentation/slides_final.pptx
@@ -3296,7 +3296,7 @@
         <p:spPr>
           <a:xfrm>
             <a:off x="502920" y="3566160"/>
-            <a:ext cx="10058400" cy="731520"/>
+            <a:ext cx="10058400" cy="822960"/>
           </a:xfrm>
           <a:prstGeom prst="rect">
             <a:avLst/>
@@ -3317,8 +3317,8 @@
                 </a:solidFill>
                 <a:latin typeface="Arial"/>
               </a:rPr>
-              <a:t>Can domain-specific heuristics reduce search cost
-while preserving profit quality?</a:t>
+              <a:t>Can domain-specific heuristics steer search faster than
+general-purpose graph algorithms — without sacrificing profit?</a:t>
             </a:r>
           </a:p>
         </p:txBody>
@@ -3331,7 +3331,7 @@
         </p:nvSpPr>
         <p:spPr>
           <a:xfrm>
-            <a:off x="502920" y="4480560"/>
+            <a:off x="502920" y="4572000"/>
             <a:ext cx="8229600" cy="457200"/>
           </a:xfrm>
           <a:prstGeom prst="rect">
@@ -3366,7 +3366,7 @@
         </p:nvSpPr>
         <p:spPr>
           <a:xfrm>
-            <a:off x="502920" y="4937760"/>
+            <a:off x="502920" y="5029200"/>
             <a:ext cx="8229600" cy="457200"/>
           </a:xfrm>
           <a:prstGeom prst="rect">
@@ -3656,7 +3656,7 @@
                 </a:solidFill>
                 <a:latin typeface="Arial"/>
               </a:rPr>
-              <a:t>The $33 Trillion Market</a:t>
+              <a:t>Stablecoins: The $33 Trillion Settlement Layer</a:t>
             </a:r>
           </a:p>
         </p:txBody>
@@ -3685,9 +3685,235 @@
           </a:prstGeom>
         </p:spPr>
       </p:pic>
+      <p:sp>
+        <p:nvSpPr>
+          <p:cNvPr id="5" name="TextBox 4"/>
+          <p:cNvSpPr txBox="1"/>
+          <p:nvPr/>
+        </p:nvSpPr>
+        <p:spPr>
+          <a:xfrm>
+            <a:off x="347472" y="777240"/>
+            <a:ext cx="5565495" cy="1280160"/>
+          </a:xfrm>
+          <a:prstGeom prst="rect">
+            <a:avLst/>
+          </a:prstGeom>
+          <a:noFill/>
+        </p:spPr>
+        <p:txBody>
+          <a:bodyPr wrap="square">
+            <a:spAutoFit/>
+          </a:bodyPr>
+          <a:lstStyle/>
+          <a:p>
+            <a:pPr algn="ctr"/>
+            <a:r>
+              <a:rPr sz="8800" b="1" i="0">
+                <a:solidFill>
+                  <a:srgbClr val="CC0633"/>
+                </a:solidFill>
+                <a:latin typeface="Arial"/>
+              </a:rPr>
+              <a:t>$300B+</a:t>
+            </a:r>
+          </a:p>
+        </p:txBody>
+      </p:sp>
+      <p:sp>
+        <p:nvSpPr>
+          <p:cNvPr id="6" name="TextBox 5"/>
+          <p:cNvSpPr txBox="1"/>
+          <p:nvPr/>
+        </p:nvSpPr>
+        <p:spPr>
+          <a:xfrm>
+            <a:off x="347472" y="2103120"/>
+            <a:ext cx="5565495" cy="365760"/>
+          </a:xfrm>
+          <a:prstGeom prst="rect">
+            <a:avLst/>
+          </a:prstGeom>
+          <a:noFill/>
+        </p:spPr>
+        <p:txBody>
+          <a:bodyPr wrap="square">
+            <a:spAutoFit/>
+          </a:bodyPr>
+          <a:lstStyle/>
+          <a:p>
+            <a:pPr algn="ctr"/>
+            <a:r>
+              <a:rPr sz="1600" b="0" i="1">
+                <a:solidFill>
+                  <a:srgbClr val="888888"/>
+                </a:solidFill>
+                <a:latin typeface="Arial"/>
+              </a:rPr>
+              <a:t>circulating supply</a:t>
+            </a:r>
+          </a:p>
+        </p:txBody>
+      </p:sp>
+      <p:sp>
+        <p:nvSpPr>
+          <p:cNvPr id="7" name="Rectangle 6"/>
+          <p:cNvSpPr/>
+          <p:nvPr/>
+        </p:nvSpPr>
+        <p:spPr>
+          <a:xfrm>
+            <a:off x="6077559" y="914400"/>
+            <a:ext cx="18288" cy="1371600"/>
+          </a:xfrm>
+          <a:prstGeom prst="rect">
+            <a:avLst/>
+          </a:prstGeom>
+          <a:solidFill>
+            <a:srgbClr val="DDDDDD"/>
+          </a:solidFill>
+          <a:ln>
+            <a:noFill/>
+          </a:ln>
+        </p:spPr>
+        <p:style>
+          <a:lnRef idx="1">
+            <a:schemeClr val="accent1"/>
+          </a:lnRef>
+          <a:fillRef idx="3">
+            <a:schemeClr val="accent1"/>
+          </a:fillRef>
+          <a:effectRef idx="2">
+            <a:schemeClr val="accent1"/>
+          </a:effectRef>
+          <a:fontRef idx="minor">
+            <a:schemeClr val="lt1"/>
+          </a:fontRef>
+        </p:style>
+        <p:txBody>
+          <a:bodyPr rtlCol="0" anchor="ctr"/>
+          <a:lstStyle/>
+          <a:p>
+            <a:pPr algn="ctr"/>
+          </a:p>
+        </p:txBody>
+      </p:sp>
+      <p:sp>
+        <p:nvSpPr>
+          <p:cNvPr id="8" name="TextBox 7"/>
+          <p:cNvSpPr txBox="1"/>
+          <p:nvPr/>
+        </p:nvSpPr>
+        <p:spPr>
+          <a:xfrm>
+            <a:off x="6278727" y="777240"/>
+            <a:ext cx="5565495" cy="1280160"/>
+          </a:xfrm>
+          <a:prstGeom prst="rect">
+            <a:avLst/>
+          </a:prstGeom>
+          <a:noFill/>
+        </p:spPr>
+        <p:txBody>
+          <a:bodyPr wrap="square">
+            <a:spAutoFit/>
+          </a:bodyPr>
+          <a:lstStyle/>
+          <a:p>
+            <a:pPr algn="ctr"/>
+            <a:r>
+              <a:rPr sz="8800" b="1" i="0">
+                <a:solidFill>
+                  <a:srgbClr val="CC0633"/>
+                </a:solidFill>
+                <a:latin typeface="Arial"/>
+              </a:rPr>
+              <a:t>$33T</a:t>
+            </a:r>
+          </a:p>
+        </p:txBody>
+      </p:sp>
+      <p:sp>
+        <p:nvSpPr>
+          <p:cNvPr id="9" name="TextBox 8"/>
+          <p:cNvSpPr txBox="1"/>
+          <p:nvPr/>
+        </p:nvSpPr>
+        <p:spPr>
+          <a:xfrm>
+            <a:off x="6278727" y="2103120"/>
+            <a:ext cx="5565495" cy="365760"/>
+          </a:xfrm>
+          <a:prstGeom prst="rect">
+            <a:avLst/>
+          </a:prstGeom>
+          <a:noFill/>
+        </p:spPr>
+        <p:txBody>
+          <a:bodyPr wrap="square">
+            <a:spAutoFit/>
+          </a:bodyPr>
+          <a:lstStyle/>
+          <a:p>
+            <a:pPr algn="ctr"/>
+            <a:r>
+              <a:rPr sz="1600" b="0" i="1">
+                <a:solidFill>
+                  <a:srgbClr val="888888"/>
+                </a:solidFill>
+                <a:latin typeface="Arial"/>
+              </a:rPr>
+              <a:t>annual on-chain volume (2024)</a:t>
+            </a:r>
+          </a:p>
+        </p:txBody>
+      </p:sp>
+      <p:sp>
+        <p:nvSpPr>
+          <p:cNvPr id="10" name="Rectangle 9"/>
+          <p:cNvSpPr/>
+          <p:nvPr/>
+        </p:nvSpPr>
+        <p:spPr>
+          <a:xfrm>
+            <a:off x="347472" y="2651759"/>
+            <a:ext cx="11496751" cy="22860"/>
+          </a:xfrm>
+          <a:prstGeom prst="rect">
+            <a:avLst/>
+          </a:prstGeom>
+          <a:solidFill>
+            <a:srgbClr val="DDDDDD"/>
+          </a:solidFill>
+          <a:ln>
+            <a:noFill/>
+          </a:ln>
+        </p:spPr>
+        <p:style>
+          <a:lnRef idx="1">
+            <a:schemeClr val="accent1"/>
+          </a:lnRef>
+          <a:fillRef idx="3">
+            <a:schemeClr val="accent1"/>
+          </a:fillRef>
+          <a:effectRef idx="2">
+            <a:schemeClr val="accent1"/>
+          </a:effectRef>
+          <a:fontRef idx="minor">
+            <a:schemeClr val="lt1"/>
+          </a:fontRef>
+        </p:style>
+        <p:txBody>
+          <a:bodyPr rtlCol="0" anchor="ctr"/>
+          <a:lstStyle/>
+          <a:p>
+            <a:pPr algn="ctr"/>
+          </a:p>
+        </p:txBody>
+      </p:sp>
       <p:pic>
         <p:nvPicPr>
-          <p:cNvPr id="5" name="Picture 4" descr="fin_market.png"/>
+          <p:cNvPr id="11" name="Picture 10" descr="fin_market_share.png"/>
           <p:cNvPicPr>
             <a:picLocks noChangeAspect="1"/>
           </p:cNvPicPr>
@@ -3701,8 +3927,8 @@
         </p:blipFill>
         <p:spPr>
           <a:xfrm>
-            <a:off x="347472" y="685800"/>
-            <a:ext cx="6583680" cy="3563114"/>
+            <a:off x="347472" y="2834639"/>
+            <a:ext cx="11496751" cy="2455742"/>
           </a:xfrm>
           <a:prstGeom prst="rect">
             <a:avLst/>
@@ -3711,90 +3937,20 @@
       </p:pic>
       <p:sp>
         <p:nvSpPr>
-          <p:cNvPr id="6" name="TextBox 5"/>
-          <p:cNvSpPr txBox="1"/>
-          <p:nvPr/>
-        </p:nvSpPr>
-        <p:spPr>
-          <a:xfrm>
-            <a:off x="7132320" y="960120"/>
-            <a:ext cx="4711903" cy="731520"/>
-          </a:xfrm>
-          <a:prstGeom prst="rect">
-            <a:avLst/>
-          </a:prstGeom>
-          <a:noFill/>
-        </p:spPr>
-        <p:txBody>
-          <a:bodyPr wrap="square">
-            <a:spAutoFit/>
-          </a:bodyPr>
-          <a:lstStyle/>
-          <a:p>
-            <a:pPr algn="ctr"/>
-            <a:r>
-              <a:rPr sz="4600" b="1" i="0">
-                <a:solidFill>
-                  <a:srgbClr val="CC0633"/>
-                </a:solidFill>
-                <a:latin typeface="Arial"/>
-              </a:rPr>
-              <a:t>$300B+</a:t>
-            </a:r>
-          </a:p>
-        </p:txBody>
-      </p:sp>
-      <p:sp>
-        <p:nvSpPr>
-          <p:cNvPr id="7" name="TextBox 6"/>
-          <p:cNvSpPr txBox="1"/>
-          <p:nvPr/>
-        </p:nvSpPr>
-        <p:spPr>
-          <a:xfrm>
-            <a:off x="7132320" y="1709928"/>
-            <a:ext cx="4711903" cy="365760"/>
-          </a:xfrm>
-          <a:prstGeom prst="rect">
-            <a:avLst/>
-          </a:prstGeom>
-          <a:noFill/>
-        </p:spPr>
-        <p:txBody>
-          <a:bodyPr wrap="square">
-            <a:spAutoFit/>
-          </a:bodyPr>
-          <a:lstStyle/>
-          <a:p>
-            <a:pPr algn="ctr"/>
-            <a:r>
-              <a:rPr sz="1300" b="0" i="1">
-                <a:solidFill>
-                  <a:srgbClr val="888888"/>
-                </a:solidFill>
-                <a:latin typeface="Arial"/>
-              </a:rPr>
-              <a:t>market cap in circulation</a:t>
-            </a:r>
-          </a:p>
-        </p:txBody>
-      </p:sp>
-      <p:sp>
-        <p:nvSpPr>
-          <p:cNvPr id="8" name="Rectangle 7"/>
+          <p:cNvPr id="12" name="Rectangle 11"/>
           <p:cNvSpPr/>
           <p:nvPr/>
         </p:nvSpPr>
         <p:spPr>
           <a:xfrm>
-            <a:off x="347472" y="2148840"/>
-            <a:ext cx="4711903" cy="22860"/>
+            <a:off x="347472" y="4206239"/>
+            <a:ext cx="11496751" cy="457200"/>
           </a:xfrm>
           <a:prstGeom prst="rect">
             <a:avLst/>
           </a:prstGeom>
           <a:solidFill>
-            <a:srgbClr val="DDDDDD"/>
+            <a:srgbClr val="1A1A2E"/>
           </a:solidFill>
           <a:ln>
             <a:noFill/>
@@ -3824,14 +3980,14 @@
       </p:sp>
       <p:sp>
         <p:nvSpPr>
-          <p:cNvPr id="9" name="TextBox 8"/>
-          <p:cNvSpPr txBox="1"/>
-          <p:nvPr/>
-        </p:nvSpPr>
-        <p:spPr>
-          <a:xfrm>
-            <a:off x="7132320" y="2350008"/>
-            <a:ext cx="4711903" cy="731520"/>
+          <p:cNvPr id="13" name="TextBox 12"/>
+          <p:cNvSpPr txBox="1"/>
+          <p:nvPr/>
+        </p:nvSpPr>
+        <p:spPr>
+          <a:xfrm>
+            <a:off x="484632" y="4288535"/>
+            <a:ext cx="11222431" cy="329184"/>
           </a:xfrm>
           <a:prstGeom prst="rect">
             <a:avLst/>
@@ -3846,134 +4002,55 @@
           <a:p>
             <a:pPr algn="ctr"/>
             <a:r>
-              <a:rPr sz="4600" b="1" i="0">
-                <a:solidFill>
-                  <a:srgbClr val="CC0633"/>
+              <a:rPr sz="1500" b="1" i="0">
+                <a:solidFill>
+                  <a:srgbClr val="FFFFFF"/>
                 </a:solidFill>
                 <a:latin typeface="Arial"/>
               </a:rPr>
-              <a:t>$33T</a:t>
-            </a:r>
-          </a:p>
-        </p:txBody>
-      </p:sp>
-      <p:sp>
-        <p:nvSpPr>
-          <p:cNvPr id="10" name="TextBox 9"/>
-          <p:cNvSpPr txBox="1"/>
-          <p:nvPr/>
-        </p:nvSpPr>
-        <p:spPr>
-          <a:xfrm>
-            <a:off x="7132320" y="3099816"/>
-            <a:ext cx="4711903" cy="365760"/>
-          </a:xfrm>
-          <a:prstGeom prst="rect">
-            <a:avLst/>
-          </a:prstGeom>
-          <a:noFill/>
-        </p:spPr>
-        <p:txBody>
-          <a:bodyPr wrap="square">
-            <a:spAutoFit/>
-          </a:bodyPr>
-          <a:lstStyle/>
-          <a:p>
-            <a:pPr algn="ctr"/>
-            <a:r>
-              <a:rPr sz="1300" b="0" i="1">
+              <a:t>12 independent exchanges  ·  same asset  ·  12 different prices at the same instant</a:t>
+            </a:r>
+          </a:p>
+        </p:txBody>
+      </p:sp>
+      <p:sp>
+        <p:nvSpPr>
+          <p:cNvPr id="14" name="TextBox 13"/>
+          <p:cNvSpPr txBox="1"/>
+          <p:nvPr/>
+        </p:nvSpPr>
+        <p:spPr>
+          <a:xfrm>
+            <a:off x="347472" y="6345936"/>
+            <a:ext cx="11496751" cy="228600"/>
+          </a:xfrm>
+          <a:prstGeom prst="rect">
+            <a:avLst/>
+          </a:prstGeom>
+          <a:noFill/>
+        </p:spPr>
+        <p:txBody>
+          <a:bodyPr wrap="square">
+            <a:spAutoFit/>
+          </a:bodyPr>
+          <a:lstStyle/>
+          <a:p>
+            <a:pPr algn="r"/>
+            <a:r>
+              <a:rPr sz="900" b="0" i="1">
                 <a:solidFill>
                   <a:srgbClr val="888888"/>
                 </a:solidFill>
                 <a:latin typeface="Arial"/>
               </a:rPr>
-              <a:t>annual volume</a:t>
-            </a:r>
-          </a:p>
-        </p:txBody>
-      </p:sp>
-      <p:sp>
-        <p:nvSpPr>
-          <p:cNvPr id="11" name="Rectangle 10"/>
-          <p:cNvSpPr/>
-          <p:nvPr/>
-        </p:nvSpPr>
-        <p:spPr>
-          <a:xfrm>
-            <a:off x="347472" y="3538728"/>
-            <a:ext cx="4711903" cy="22860"/>
-          </a:xfrm>
-          <a:prstGeom prst="rect">
-            <a:avLst/>
-          </a:prstGeom>
-          <a:solidFill>
-            <a:srgbClr val="DDDDDD"/>
-          </a:solidFill>
-          <a:ln>
-            <a:noFill/>
-          </a:ln>
-        </p:spPr>
-        <p:style>
-          <a:lnRef idx="1">
-            <a:schemeClr val="accent1"/>
-          </a:lnRef>
-          <a:fillRef idx="3">
-            <a:schemeClr val="accent1"/>
-          </a:fillRef>
-          <a:effectRef idx="2">
-            <a:schemeClr val="accent1"/>
-          </a:effectRef>
-          <a:fontRef idx="minor">
-            <a:schemeClr val="lt1"/>
-          </a:fontRef>
-        </p:style>
-        <p:txBody>
-          <a:bodyPr rtlCol="0" anchor="ctr"/>
-          <a:lstStyle/>
-          <a:p>
-            <a:pPr algn="ctr"/>
-          </a:p>
-        </p:txBody>
-      </p:sp>
-      <p:sp>
-        <p:nvSpPr>
-          <p:cNvPr id="12" name="TextBox 11"/>
-          <p:cNvSpPr txBox="1"/>
-          <p:nvPr/>
-        </p:nvSpPr>
-        <p:spPr>
-          <a:xfrm>
-            <a:off x="7132320" y="3922776"/>
-            <a:ext cx="4711903" cy="1005840"/>
-          </a:xfrm>
-          <a:prstGeom prst="rect">
-            <a:avLst/>
-          </a:prstGeom>
-          <a:noFill/>
-        </p:spPr>
-        <p:txBody>
-          <a:bodyPr wrap="square">
-            <a:spAutoFit/>
-          </a:bodyPr>
-          <a:lstStyle/>
-          <a:p>
-            <a:pPr algn="ctr"/>
-            <a:r>
-              <a:rPr sz="1400" b="0" i="1">
-                <a:solidFill>
-                  <a:srgbClr val="1A1A2E"/>
-                </a:solidFill>
-                <a:latin typeface="Arial"/>
-              </a:rPr>
-              <a:t>"The liquidity highways of
-the entire crypto ecosystem"</a:t>
-            </a:r>
-          </a:p>
-        </p:txBody>
-      </p:sp>
-      <p:sp>
-        <p:nvSpPr>
-          <p:cNvPr id="13" name="Rectangle 12"/>
+              <a:t>Source: stablecoin volume &amp; supply — verify citation</a:t>
+            </a:r>
+          </a:p>
+        </p:txBody>
+      </p:sp>
+      <p:sp>
+        <p:nvSpPr>
+          <p:cNvPr id="15" name="Rectangle 14"/>
           <p:cNvSpPr/>
           <p:nvPr/>
         </p:nvSpPr>
@@ -4016,7 +4093,7 @@
       </p:sp>
       <p:sp>
         <p:nvSpPr>
-          <p:cNvPr id="14" name="TextBox 13"/>
+          <p:cNvPr id="16" name="TextBox 15"/>
           <p:cNvSpPr txBox="1"/>
           <p:nvPr/>
         </p:nvSpPr>
@@ -4051,7 +4128,7 @@
       </p:sp>
       <p:sp>
         <p:nvSpPr>
-          <p:cNvPr id="15" name="TextBox 14"/>
+          <p:cNvPr id="17" name="TextBox 16"/>
           <p:cNvSpPr txBox="1"/>
           <p:nvPr/>
         </p:nvSpPr>
@@ -4086,7 +4163,7 @@
       </p:sp>
       <p:sp>
         <p:nvSpPr>
-          <p:cNvPr id="16" name="TextBox 15"/>
+          <p:cNvPr id="18" name="TextBox 17"/>
           <p:cNvSpPr txBox="1"/>
           <p:nvPr/>
         </p:nvSpPr>
@@ -4210,7 +4287,7 @@
                 </a:solidFill>
                 <a:latin typeface="Arial"/>
               </a:rPr>
-              <a:t>The Problem: Four Execution Barriers</a:t>
+              <a:t>Why Shortest-Path Isn't Enough: Four Real-World Costs</a:t>
             </a:r>
           </a:p>
         </p:txBody>
@@ -4261,7 +4338,7 @@
           </a:bodyPr>
           <a:lstStyle/>
           <a:p>
-            <a:pPr algn="l"/>
+            <a:pPr algn="ctr"/>
             <a:r>
               <a:rPr sz="1500" b="0" i="1">
                 <a:solidFill>
@@ -4269,7 +4346,7 @@
                 </a:solidFill>
                 <a:latin typeface="Arial"/>
               </a:rPr>
-              <a:t>"It is 2 AM. USDT is cheaper on Kraken than KuCoin. The math works. Existing systems say: take it."</a:t>
+              <a:t>Each cost collapses candidate paths the moment you try to execute them.</a:t>
             </a:r>
           </a:p>
         </p:txBody>
@@ -4326,7 +4403,7 @@
         <p:spPr>
           <a:xfrm>
             <a:off x="347472" y="1325880"/>
-            <a:ext cx="2750743" cy="2286000"/>
+            <a:ext cx="2750743" cy="2468880"/>
           </a:xfrm>
           <a:prstGeom prst="rect">
             <a:avLst/>
@@ -4384,13 +4461,13 @@
           <a:p>
             <a:pPr algn="l"/>
             <a:r>
-              <a:rPr sz="1700" b="1" i="0">
+              <a:rPr sz="1800" b="1" i="0">
                 <a:solidFill>
                   <a:srgbClr val="FFFFFF"/>
                 </a:solidFill>
                 <a:latin typeface="Arial"/>
               </a:rPr>
-              <a:t>1  Liquidity</a:t>
+              <a:t>1  Fees</a:t>
             </a:r>
           </a:p>
         </p:txBody>
@@ -4403,8 +4480,8 @@
         </p:nvSpPr>
         <p:spPr>
           <a:xfrm>
-            <a:off x="457200" y="1984248"/>
-            <a:ext cx="2531287" cy="1554480"/>
+            <a:off x="457200" y="2039112"/>
+            <a:ext cx="2531287" cy="1691640"/>
           </a:xfrm>
           <a:prstGeom prst="rect">
             <a:avLst/>
@@ -4425,8 +4502,8 @@
                 </a:solidFill>
                 <a:latin typeface="Arial"/>
               </a:rPr>
-              <a:t>Order may exhaust
-book depth</a:t>
+              <a:t>Taker fees compound
+across every hop</a:t>
             </a:r>
           </a:p>
         </p:txBody>
@@ -4440,7 +4517,7 @@
         <p:spPr>
           <a:xfrm>
             <a:off x="3262807" y="1325880"/>
-            <a:ext cx="2750743" cy="2286000"/>
+            <a:ext cx="2750743" cy="2468880"/>
           </a:xfrm>
           <a:prstGeom prst="rect">
             <a:avLst/>
@@ -4498,13 +4575,13 @@
           <a:p>
             <a:pPr algn="l"/>
             <a:r>
-              <a:rPr sz="1700" b="1" i="0">
+              <a:rPr sz="1800" b="1" i="0">
                 <a:solidFill>
                   <a:srgbClr val="FFFFFF"/>
                 </a:solidFill>
                 <a:latin typeface="Arial"/>
               </a:rPr>
-              <a:t>2  Slippage ★</a:t>
+              <a:t>2  Slippage  ★</a:t>
             </a:r>
           </a:p>
         </p:txBody>
@@ -4517,8 +4594,8 @@
         </p:nvSpPr>
         <p:spPr>
           <a:xfrm>
-            <a:off x="3372535" y="1984248"/>
-            <a:ext cx="2531287" cy="1554480"/>
+            <a:off x="3372535" y="2039112"/>
+            <a:ext cx="2531287" cy="1691640"/>
           </a:xfrm>
           <a:prstGeom prst="rect">
             <a:avLst/>
@@ -4539,8 +4616,9 @@
                 </a:solidFill>
                 <a:latin typeface="Arial"/>
               </a:rPr>
-              <a:t>Large orders move
-price mid-fill</a:t>
+              <a:t>Large orders walk the
+L2 book — VWAP
+diverges from mid</a:t>
             </a:r>
           </a:p>
         </p:txBody>
@@ -4554,7 +4632,7 @@
         <p:spPr>
           <a:xfrm>
             <a:off x="6178143" y="1325880"/>
-            <a:ext cx="2750743" cy="2286000"/>
+            <a:ext cx="2750743" cy="2468880"/>
           </a:xfrm>
           <a:prstGeom prst="rect">
             <a:avLst/>
@@ -4612,7 +4690,7 @@
           <a:p>
             <a:pPr algn="l"/>
             <a:r>
-              <a:rPr sz="1700" b="1" i="0">
+              <a:rPr sz="1800" b="1" i="0">
                 <a:solidFill>
                   <a:srgbClr val="FFFFFF"/>
                 </a:solidFill>
@@ -4631,8 +4709,8 @@
         </p:nvSpPr>
         <p:spPr>
           <a:xfrm>
-            <a:off x="6287871" y="1984248"/>
-            <a:ext cx="2531287" cy="1554480"/>
+            <a:off x="6287871" y="2039112"/>
+            <a:ext cx="2531287" cy="1691640"/>
           </a:xfrm>
           <a:prstGeom prst="rect">
             <a:avLst/>
@@ -4653,8 +4731,9 @@
                 </a:solidFill>
                 <a:latin typeface="Arial"/>
               </a:rPr>
-              <a:t>Settlement may
-miss the window</a:t>
+              <a:t>Cross-exchange transfers
+settle on-chain;
+block times eat the window</a:t>
             </a:r>
           </a:p>
         </p:txBody>
@@ -4668,7 +4747,7 @@
         <p:spPr>
           <a:xfrm>
             <a:off x="9093479" y="1325880"/>
-            <a:ext cx="2750743" cy="2286000"/>
+            <a:ext cx="2750743" cy="2468880"/>
           </a:xfrm>
           <a:prstGeom prst="rect">
             <a:avLst/>
@@ -4726,13 +4805,13 @@
           <a:p>
             <a:pPr algn="l"/>
             <a:r>
-              <a:rPr sz="1700" b="1" i="0">
+              <a:rPr sz="1800" b="1" i="0">
                 <a:solidFill>
                   <a:srgbClr val="FFFFFF"/>
                 </a:solidFill>
                 <a:latin typeface="Arial"/>
               </a:rPr>
-              <a:t>4  Reliability</a:t>
+              <a:t>4  Operational Risk</a:t>
             </a:r>
           </a:p>
         </p:txBody>
@@ -4745,8 +4824,8 @@
         </p:nvSpPr>
         <p:spPr>
           <a:xfrm>
-            <a:off x="9203207" y="1984248"/>
-            <a:ext cx="2531287" cy="1554480"/>
+            <a:off x="9203207" y="2039112"/>
+            <a:ext cx="2531287" cy="1691640"/>
           </a:xfrm>
           <a:prstGeom prst="rect">
             <a:avLst/>
@@ -4767,8 +4846,9 @@
                 </a:solidFill>
                 <a:latin typeface="Arial"/>
               </a:rPr>
-              <a:t>Exchanges may
-suspend withdrawals</a:t>
+              <a:t>Withdrawals paused ·
+regions geofenced /
+VPN-blocked</a:t>
             </a:r>
           </a:p>
         </p:txBody>
@@ -4781,8 +4861,8 @@
         </p:nvSpPr>
         <p:spPr>
           <a:xfrm>
-            <a:off x="347472" y="3813048"/>
-            <a:ext cx="11496751" cy="402336"/>
+            <a:off x="347472" y="3995928"/>
+            <a:ext cx="11496751" cy="457200"/>
           </a:xfrm>
           <a:prstGeom prst="rect">
             <a:avLst/>
@@ -4824,8 +4904,8 @@
         </p:nvSpPr>
         <p:spPr>
           <a:xfrm>
-            <a:off x="484632" y="3877056"/>
-            <a:ext cx="11222431" cy="347472"/>
+            <a:off x="484632" y="4078224"/>
+            <a:ext cx="11222431" cy="365760"/>
           </a:xfrm>
           <a:prstGeom prst="rect">
             <a:avLst/>
@@ -4840,13 +4920,13 @@
           <a:p>
             <a:pPr algn="ctr"/>
             <a:r>
-              <a:rPr sz="1500" b="1" i="0">
+              <a:rPr sz="1400" b="1" i="0">
                 <a:solidFill>
                   <a:srgbClr val="CC0633"/>
                 </a:solidFill>
                 <a:latin typeface="Arial"/>
               </a:rPr>
-              <a:t>Bellman-Ford · 1-hop · 2-hop enumeration — all fail under live market conditions.</a:t>
+              <a:t>Bellman-Ford  ·  1-hop  ·  2-hop enumeration  —  none returned a profitable executable path under live conditions.</a:t>
             </a:r>
           </a:p>
         </p:txBody>
@@ -5090,7 +5170,7 @@
                 </a:solidFill>
                 <a:latin typeface="Arial"/>
               </a:rPr>
-              <a:t>Dataset: The First Execution-Aware Stablecoin Graph</a:t>
+              <a:t>Dataset: First Academically Integrated CEX Stablecoin Graph</a:t>
             </a:r>
           </a:p>
         </p:txBody>
@@ -5420,7 +5500,7 @@
                 </a:solidFill>
                 <a:latin typeface="Arial"/>
               </a:rPr>
-              <a:t>edges</a:t>
+              <a:t>directed edges</a:t>
             </a:r>
           </a:p>
         </p:txBody>
@@ -5499,8 +5579,8 @@
                 <a:latin typeface="Arial"/>
               </a:rPr>
               <a:t>Every edge carries:
-taker fee · VWAP slippage ·
-gas cost · venue reliability</a:t>
+taker fee  ·  L2 slippage  ·
+on-chain settlement  ·  venue reliability</a:t>
             </a:r>
           </a:p>
         </p:txBody>
@@ -5744,7 +5824,7 @@
                 </a:solidFill>
                 <a:latin typeface="Arial"/>
               </a:rPr>
-              <a:t>Method: A* Search — Google Maps for Money</a:t>
+              <a:t>Method: A* Search with Execution-Aware Heuristic</a:t>
             </a:r>
           </a:p>
         </p:txBody>
@@ -5797,7 +5877,7 @@
           <a:p>
             <a:pPr algn="ctr"/>
             <a:r>
-              <a:rPr sz="3600" b="1" i="0">
+              <a:rPr sz="3800" b="1" i="0">
                 <a:solidFill>
                   <a:srgbClr val="1A1A2E"/>
                 </a:solidFill>
@@ -5816,8 +5896,8 @@
         </p:nvSpPr>
         <p:spPr>
           <a:xfrm>
-            <a:off x="347472" y="1325880"/>
-            <a:ext cx="11496751" cy="365760"/>
+            <a:off x="347472" y="1353312"/>
+            <a:ext cx="11496751" cy="320040"/>
           </a:xfrm>
           <a:prstGeom prst="rect">
             <a:avLst/>
@@ -5832,26 +5912,61 @@
           <a:p>
             <a:pPr algn="ctr"/>
             <a:r>
-              <a:rPr sz="1500" b="0" i="1">
+              <a:rPr sz="1400" b="0" i="1">
+                <a:solidFill>
+                  <a:srgbClr val="CC0633"/>
+                </a:solidFill>
+                <a:latin typeface="Arial"/>
+              </a:rPr>
+              <a:t>A*  =  Dijkstra's algorithm  +  goal-directed heuristic</a:t>
+            </a:r>
+          </a:p>
+        </p:txBody>
+      </p:sp>
+      <p:sp>
+        <p:nvSpPr>
+          <p:cNvPr id="7" name="TextBox 6"/>
+          <p:cNvSpPr txBox="1"/>
+          <p:nvPr/>
+        </p:nvSpPr>
+        <p:spPr>
+          <a:xfrm>
+            <a:off x="347472" y="1664208"/>
+            <a:ext cx="11496751" cy="320040"/>
+          </a:xfrm>
+          <a:prstGeom prst="rect">
+            <a:avLst/>
+          </a:prstGeom>
+          <a:noFill/>
+        </p:spPr>
+        <p:txBody>
+          <a:bodyPr wrap="square">
+            <a:spAutoFit/>
+          </a:bodyPr>
+          <a:lstStyle/>
+          <a:p>
+            <a:pPr algn="ctr"/>
+            <a:r>
+              <a:rPr sz="1300" b="0" i="1">
                 <a:solidFill>
                   <a:srgbClr val="888888"/>
                 </a:solidFill>
                 <a:latin typeface="Arial"/>
               </a:rPr>
-              <a:t>g(n) = accumulated execution cost so far          h(n) = domain-specific risk estimate ahead</a:t>
-            </a:r>
-          </a:p>
-        </p:txBody>
-      </p:sp>
-      <p:sp>
-        <p:nvSpPr>
-          <p:cNvPr id="7" name="Rectangle 6"/>
+              <a:t>g(n)  accumulated execution cost so far          h(n)  domain-specific estimate of remaining risk</a:t>
+            </a:r>
+          </a:p>
+        </p:txBody>
+      </p:sp>
+      <p:sp>
+        <p:nvSpPr>
+          <p:cNvPr id="8" name="Rectangle 7"/>
           <p:cNvSpPr/>
           <p:nvPr/>
         </p:nvSpPr>
         <p:spPr>
           <a:xfrm>
-            <a:off x="347472" y="1755648"/>
+            <a:off x="347472" y="2057400"/>
             <a:ext cx="11496751" cy="22860"/>
           </a:xfrm>
           <a:prstGeom prst="rect">
@@ -5888,7 +6003,7 @@
       </p:sp>
       <p:pic>
         <p:nvPicPr>
-          <p:cNvPr id="8" name="Picture 7" descr="fin_pipeline.png"/>
+          <p:cNvPr id="9" name="Picture 8" descr="fin_pipeline.png"/>
           <p:cNvPicPr>
             <a:picLocks noChangeAspect="1"/>
           </p:cNvPicPr>
@@ -5902,7 +6017,7 @@
         </p:blipFill>
         <p:spPr>
           <a:xfrm>
-            <a:off x="347472" y="1874520"/>
+            <a:off x="347472" y="2148840"/>
             <a:ext cx="11496751" cy="3594247"/>
           </a:xfrm>
           <a:prstGeom prst="rect">
@@ -5912,7 +6027,7 @@
       </p:pic>
       <p:sp>
         <p:nvSpPr>
-          <p:cNvPr id="9" name="Rectangle 8"/>
+          <p:cNvPr id="10" name="Rectangle 9"/>
           <p:cNvSpPr/>
           <p:nvPr/>
         </p:nvSpPr>
@@ -5955,7 +6070,7 @@
       </p:sp>
       <p:sp>
         <p:nvSpPr>
-          <p:cNvPr id="10" name="TextBox 9"/>
+          <p:cNvPr id="11" name="TextBox 10"/>
           <p:cNvSpPr txBox="1"/>
           <p:nvPr/>
         </p:nvSpPr>
@@ -5990,7 +6105,7 @@
       </p:sp>
       <p:sp>
         <p:nvSpPr>
-          <p:cNvPr id="11" name="TextBox 10"/>
+          <p:cNvPr id="12" name="TextBox 11"/>
           <p:cNvSpPr txBox="1"/>
           <p:nvPr/>
         </p:nvSpPr>
@@ -6025,7 +6140,7 @@
       </p:sp>
       <p:sp>
         <p:nvSpPr>
-          <p:cNvPr id="12" name="TextBox 11"/>
+          <p:cNvPr id="13" name="TextBox 12"/>
           <p:cNvSpPr txBox="1"/>
           <p:nvPr/>
         </p:nvSpPr>
@@ -6200,7 +6315,7 @@
           </a:bodyPr>
           <a:lstStyle/>
           <a:p>
-            <a:pPr algn="l"/>
+            <a:pPr algn="ctr"/>
             <a:r>
               <a:rPr sz="1500" b="0" i="1">
                 <a:solidFill>
@@ -6208,7 +6323,7 @@
                 </a:solidFill>
                 <a:latin typeface="Arial"/>
               </a:rPr>
-              <a:t>Each heuristic adds a domain-specific penalty to h(n), steering A* toward paths that are profitable AND executable.</a:t>
+              <a:t>Each adds a domain-specific penalty to h(n) — steering A* away from paths too risky to execute under live costs.</a:t>
             </a:r>
           </a:p>
         </p:txBody>
@@ -6378,7 +6493,7 @@
         <p:spPr>
           <a:xfrm>
             <a:off x="438912" y="2414016"/>
-            <a:ext cx="2103120" cy="1097280"/>
+            <a:ext cx="2103120" cy="1188720"/>
           </a:xfrm>
           <a:prstGeom prst="rect">
             <a:avLst/>
@@ -6399,9 +6514,9 @@
                 </a:solidFill>
                 <a:latin typeface="Courier New"/>
               </a:rPr>
-              <a:t>Penalises paths where
-order size exceeds
-book depth</a:t>
+              <a:t>Live L2 book depth
+penalty — too thin
+to absorb order size</a:t>
             </a:r>
           </a:p>
         </p:txBody>
@@ -6414,7 +6529,7 @@
         </p:nvSpPr>
         <p:spPr>
           <a:xfrm>
-            <a:off x="438912" y="3675888"/>
+            <a:off x="438912" y="3767328"/>
             <a:ext cx="2103120" cy="777240"/>
           </a:xfrm>
           <a:prstGeom prst="rect">
@@ -6436,8 +6551,8 @@
                 </a:solidFill>
                 <a:latin typeface="Arial"/>
               </a:rPr>
-              <a:t>"Is there enough
-market depth?"</a:t>
+              <a:t>"Can the book
+absorb our size?"</a:t>
             </a:r>
           </a:p>
         </p:txBody>
@@ -6564,7 +6679,7 @@
         <p:spPr>
           <a:xfrm>
             <a:off x="2907792" y="2414016"/>
-            <a:ext cx="2103120" cy="1097280"/>
+            <a:ext cx="2103120" cy="1188720"/>
           </a:xfrm>
           <a:prstGeom prst="rect">
             <a:avLst/>
@@ -6600,7 +6715,7 @@
         </p:nvSpPr>
         <p:spPr>
           <a:xfrm>
-            <a:off x="2907792" y="3675888"/>
+            <a:off x="2907792" y="3767328"/>
             <a:ext cx="2103120" cy="777240"/>
           </a:xfrm>
           <a:prstGeom prst="rect">
@@ -6736,7 +6851,7 @@
                 </a:solidFill>
                 <a:latin typeface="Arial"/>
               </a:rPr>
-              <a:t>Chain+Venue</a:t>
+              <a:t>Chain + Venue</a:t>
             </a:r>
           </a:p>
         </p:txBody>
@@ -6750,7 +6865,7 @@
         <p:spPr>
           <a:xfrm>
             <a:off x="5376672" y="2414016"/>
-            <a:ext cx="2103120" cy="1097280"/>
+            <a:ext cx="2103120" cy="1188720"/>
           </a:xfrm>
           <a:prstGeom prst="rect">
             <a:avLst/>
@@ -6771,9 +6886,9 @@
                 </a:solidFill>
                 <a:latin typeface="Courier New"/>
               </a:rPr>
-              <a:t>Congestion penalty
-+ venue reliability
-discount</a:t>
+              <a:t>On-chain settlement
+time penalty + venue
+reliability discount</a:t>
             </a:r>
           </a:p>
         </p:txBody>
@@ -6786,7 +6901,7 @@
         </p:nvSpPr>
         <p:spPr>
           <a:xfrm>
-            <a:off x="5376672" y="3675888"/>
+            <a:off x="5376672" y="3767328"/>
             <a:ext cx="2103120" cy="777240"/>
           </a:xfrm>
           <a:prstGeom prst="rect">
@@ -6903,7 +7018,7 @@
                 </a:solidFill>
                 <a:latin typeface="Arial"/>
               </a:rPr>
-              <a:t>One of these three will prove decisive.</a:t>
+              <a:t>One of these three consistently outperforms the others.</a:t>
             </a:r>
           </a:p>
         </p:txBody>
@@ -7551,22 +7666,57 @@
           <a:p>
             <a:pPr algn="ctr"/>
             <a:r>
-              <a:rPr sz="1400" b="1" i="0">
+              <a:rPr sz="1500" b="1" i="0">
                 <a:solidFill>
                   <a:srgbClr val="CC0633"/>
                 </a:solidFill>
                 <a:latin typeface="Arial"/>
               </a:rPr>
-              <a:t>100%
-of searches found
-a profitable path</a:t>
-            </a:r>
-          </a:p>
-        </p:txBody>
-      </p:sp>
-      <p:sp>
-        <p:nvSpPr>
-          <p:cNvPr id="7" name="Rectangle 6"/>
+              <a:t>7,200 / 7,200
+surfaced
+profitable paths</a:t>
+            </a:r>
+          </a:p>
+        </p:txBody>
+      </p:sp>
+      <p:sp>
+        <p:nvSpPr>
+          <p:cNvPr id="7" name="TextBox 6"/>
+          <p:cNvSpPr txBox="1"/>
+          <p:nvPr/>
+        </p:nvSpPr>
+        <p:spPr>
+          <a:xfrm>
+            <a:off x="9722815" y="2057400"/>
+            <a:ext cx="2194560" cy="365760"/>
+          </a:xfrm>
+          <a:prstGeom prst="rect">
+            <a:avLst/>
+          </a:prstGeom>
+          <a:noFill/>
+        </p:spPr>
+        <p:txBody>
+          <a:bodyPr wrap="square">
+            <a:spAutoFit/>
+          </a:bodyPr>
+          <a:lstStyle/>
+          <a:p>
+            <a:pPr algn="ctr"/>
+            <a:r>
+              <a:rPr sz="1100" b="0" i="1">
+                <a:solidFill>
+                  <a:srgbClr val="888888"/>
+                </a:solidFill>
+                <a:latin typeface="Arial"/>
+              </a:rPr>
+              <a:t>Reproducible at high volume — not a one-off</a:t>
+            </a:r>
+          </a:p>
+        </p:txBody>
+      </p:sp>
+      <p:sp>
+        <p:nvSpPr>
+          <p:cNvPr id="8" name="Rectangle 7"/>
           <p:cNvSpPr/>
           <p:nvPr/>
         </p:nvSpPr>
@@ -7609,7 +7759,7 @@
       </p:sp>
       <p:pic>
         <p:nvPicPr>
-          <p:cNvPr id="8" name="Picture 7" descr="fig09_quote_staleness.png"/>
+          <p:cNvPr id="9" name="Picture 8" descr="fig09_quote_staleness.png"/>
           <p:cNvPicPr>
             <a:picLocks noChangeAspect="1"/>
           </p:cNvPicPr>
@@ -7633,7 +7783,7 @@
       </p:pic>
       <p:sp>
         <p:nvSpPr>
-          <p:cNvPr id="9" name="TextBox 8"/>
+          <p:cNvPr id="10" name="TextBox 9"/>
           <p:cNvSpPr txBox="1"/>
           <p:nvPr/>
         </p:nvSpPr>
@@ -7670,7 +7820,7 @@
       </p:sp>
       <p:sp>
         <p:nvSpPr>
-          <p:cNvPr id="10" name="TextBox 9"/>
+          <p:cNvPr id="11" name="TextBox 10"/>
           <p:cNvSpPr txBox="1"/>
           <p:nvPr/>
         </p:nvSpPr>
@@ -7705,7 +7855,7 @@
       </p:sp>
       <p:sp>
         <p:nvSpPr>
-          <p:cNvPr id="11" name="Rectangle 10"/>
+          <p:cNvPr id="12" name="Rectangle 11"/>
           <p:cNvSpPr/>
           <p:nvPr/>
         </p:nvSpPr>
@@ -7748,7 +7898,7 @@
       </p:sp>
       <p:sp>
         <p:nvSpPr>
-          <p:cNvPr id="12" name="TextBox 11"/>
+          <p:cNvPr id="13" name="TextBox 12"/>
           <p:cNvSpPr txBox="1"/>
           <p:nvPr/>
         </p:nvSpPr>
@@ -7783,7 +7933,7 @@
       </p:sp>
       <p:sp>
         <p:nvSpPr>
-          <p:cNvPr id="13" name="TextBox 12"/>
+          <p:cNvPr id="14" name="TextBox 13"/>
           <p:cNvSpPr txBox="1"/>
           <p:nvPr/>
         </p:nvSpPr>
@@ -7818,7 +7968,7 @@
       </p:sp>
       <p:sp>
         <p:nvSpPr>
-          <p:cNvPr id="14" name="TextBox 13"/>
+          <p:cNvPr id="15" name="TextBox 14"/>
           <p:cNvSpPr txBox="1"/>
           <p:nvPr/>
         </p:nvSpPr>
@@ -7989,7 +8139,7 @@
         </p:nvSpPr>
         <p:spPr>
           <a:xfrm>
-            <a:off x="502920" y="914400"/>
+            <a:off x="502920" y="822960"/>
             <a:ext cx="5943600" cy="1005840"/>
           </a:xfrm>
           <a:prstGeom prst="rect">
@@ -8024,7 +8174,7 @@
         </p:nvSpPr>
         <p:spPr>
           <a:xfrm>
-            <a:off x="502920" y="1920240"/>
+            <a:off x="502920" y="1828800"/>
             <a:ext cx="5943600" cy="1005840"/>
           </a:xfrm>
           <a:prstGeom prst="rect">
@@ -8059,7 +8209,7 @@
         </p:nvSpPr>
         <p:spPr>
           <a:xfrm>
-            <a:off x="502920" y="2926080"/>
+            <a:off x="502920" y="2834640"/>
             <a:ext cx="5943600" cy="1005840"/>
           </a:xfrm>
           <a:prstGeom prst="rect">
@@ -8094,7 +8244,42 @@
         </p:nvSpPr>
         <p:spPr>
           <a:xfrm>
-            <a:off x="502920" y="4114800"/>
+            <a:off x="502920" y="3977639"/>
+            <a:ext cx="6400800" cy="457200"/>
+          </a:xfrm>
+          <a:prstGeom prst="rect">
+            <a:avLst/>
+          </a:prstGeom>
+          <a:noFill/>
+        </p:spPr>
+        <p:txBody>
+          <a:bodyPr wrap="square">
+            <a:spAutoFit/>
+          </a:bodyPr>
+          <a:lstStyle/>
+          <a:p>
+            <a:pPr algn="l"/>
+            <a:r>
+              <a:rPr sz="1500" b="0" i="1">
+                <a:solidFill>
+                  <a:srgbClr val="FFCCCC"/>
+                </a:solidFill>
+                <a:latin typeface="Arial"/>
+              </a:rPr>
+              <a:t>—  Google Maps, for $33 trillion in stablecoin volume.</a:t>
+            </a:r>
+          </a:p>
+        </p:txBody>
+      </p:sp>
+      <p:sp>
+        <p:nvSpPr>
+          <p:cNvPr id="9" name="TextBox 8"/>
+          <p:cNvSpPr txBox="1"/>
+          <p:nvPr/>
+        </p:nvSpPr>
+        <p:spPr>
+          <a:xfrm>
+            <a:off x="502920" y="4617720"/>
             <a:ext cx="5943600" cy="548640"/>
           </a:xfrm>
           <a:prstGeom prst="rect">
@@ -8123,13 +8308,13 @@
       </p:sp>
       <p:sp>
         <p:nvSpPr>
-          <p:cNvPr id="9" name="TextBox 8"/>
-          <p:cNvSpPr txBox="1"/>
-          <p:nvPr/>
-        </p:nvSpPr>
-        <p:spPr>
-          <a:xfrm>
-            <a:off x="502920" y="4754880"/>
+          <p:cNvPr id="10" name="TextBox 9"/>
+          <p:cNvSpPr txBox="1"/>
+          <p:nvPr/>
+        </p:nvSpPr>
+        <p:spPr>
+          <a:xfrm>
+            <a:off x="502920" y="5166360"/>
             <a:ext cx="6400800" cy="411480"/>
           </a:xfrm>
           <a:prstGeom prst="rect">
@@ -8158,7 +8343,7 @@
       </p:sp>
       <p:pic>
         <p:nvPicPr>
-          <p:cNvPr id="10" name="Picture 9" descr="fig18_radar_summary.png"/>
+          <p:cNvPr id="11" name="Picture 10" descr="fig18_radar_summary.png"/>
           <p:cNvPicPr>
             <a:picLocks noChangeAspect="1"/>
           </p:cNvPicPr>
@@ -8182,7 +8367,7 @@
       </p:pic>
       <p:sp>
         <p:nvSpPr>
-          <p:cNvPr id="11" name="TextBox 10"/>
+          <p:cNvPr id="12" name="TextBox 11"/>
           <p:cNvSpPr txBox="1"/>
           <p:nvPr/>
         </p:nvSpPr>
@@ -8217,7 +8402,7 @@
       </p:sp>
       <p:pic>
         <p:nvPicPr>
-          <p:cNvPr id="12" name="Picture 11" descr="logo-canai-2026.png"/>
+          <p:cNvPr id="13" name="Picture 12" descr="logo-canai-2026.png"/>
           <p:cNvPicPr>
             <a:picLocks noChangeAspect="1"/>
           </p:cNvPicPr>
@@ -8241,7 +8426,7 @@
       </p:pic>
       <p:sp>
         <p:nvSpPr>
-          <p:cNvPr id="13" name="Rectangle 12"/>
+          <p:cNvPr id="14" name="Rectangle 13"/>
           <p:cNvSpPr/>
           <p:nvPr/>
         </p:nvSpPr>
@@ -8284,7 +8469,7 @@
       </p:sp>
       <p:sp>
         <p:nvSpPr>
-          <p:cNvPr id="14" name="TextBox 13"/>
+          <p:cNvPr id="15" name="TextBox 14"/>
           <p:cNvSpPr txBox="1"/>
           <p:nvPr/>
         </p:nvSpPr>
@@ -8319,7 +8504,7 @@
       </p:sp>
       <p:sp>
         <p:nvSpPr>
-          <p:cNvPr id="15" name="TextBox 14"/>
+          <p:cNvPr id="16" name="TextBox 15"/>
           <p:cNvSpPr txBox="1"/>
           <p:nvPr/>
         </p:nvSpPr>
@@ -8354,7 +8539,7 @@
       </p:sp>
       <p:sp>
         <p:nvSpPr>
-          <p:cNvPr id="16" name="TextBox 15"/>
+          <p:cNvPr id="17" name="TextBox 16"/>
           <p:cNvSpPr txBox="1"/>
           <p:nvPr/>
         </p:nvSpPr>

--- a/docs/latex/StablecoinArbitrage_GSS2026/presentation/slides_final.pptx
+++ b/docs/latex/StablecoinArbitrage_GSS2026/presentation/slides_final.pptx
@@ -6302,7 +6302,7 @@
         <p:spPr>
           <a:xfrm>
             <a:off x="347472" y="685800"/>
-            <a:ext cx="11496751" cy="457200"/>
+            <a:ext cx="11496751" cy="365760"/>
           </a:xfrm>
           <a:prstGeom prst="rect">
             <a:avLst/>
@@ -6317,7 +6317,7 @@
           <a:p>
             <a:pPr algn="ctr"/>
             <a:r>
-              <a:rPr sz="1500" b="0" i="1">
+              <a:rPr sz="1400" b="0" i="1">
                 <a:solidFill>
                   <a:srgbClr val="1A1A2E"/>
                 </a:solidFill>
@@ -6336,7 +6336,7 @@
         </p:nvSpPr>
         <p:spPr>
           <a:xfrm>
-            <a:off x="347472" y="1188720"/>
+            <a:off x="347472" y="1143000"/>
             <a:ext cx="11496751" cy="22860"/>
           </a:xfrm>
           <a:prstGeom prst="rect">
@@ -6379,8 +6379,8 @@
         </p:nvSpPr>
         <p:spPr>
           <a:xfrm>
-            <a:off x="347472" y="1298448"/>
-            <a:ext cx="2286000" cy="3657600"/>
+            <a:off x="347472" y="1234440"/>
+            <a:ext cx="2286000" cy="3840480"/>
           </a:xfrm>
           <a:prstGeom prst="rect">
             <a:avLst/>
@@ -6422,8 +6422,8 @@
         </p:nvSpPr>
         <p:spPr>
           <a:xfrm>
-            <a:off x="438912" y="1389888"/>
-            <a:ext cx="2103120" cy="594360"/>
+            <a:off x="438912" y="1325880"/>
+            <a:ext cx="2103120" cy="548640"/>
           </a:xfrm>
           <a:prstGeom prst="rect">
             <a:avLst/>
@@ -6438,7 +6438,7 @@
           <a:p>
             <a:pPr algn="ctr"/>
             <a:r>
-              <a:rPr sz="2800" b="1" i="0">
+              <a:rPr sz="2600" b="1" i="0">
                 <a:solidFill>
                   <a:srgbClr val="FFFFFF"/>
                 </a:solidFill>
@@ -6457,8 +6457,8 @@
         </p:nvSpPr>
         <p:spPr>
           <a:xfrm>
-            <a:off x="438912" y="1984248"/>
-            <a:ext cx="2103120" cy="411480"/>
+            <a:off x="438912" y="1892808"/>
+            <a:ext cx="2103120" cy="365760"/>
           </a:xfrm>
           <a:prstGeom prst="rect">
             <a:avLst/>
@@ -6473,500 +6473,20 @@
           <a:p>
             <a:pPr algn="ctr"/>
             <a:r>
-              <a:rPr sz="1700" b="1" i="0">
+              <a:rPr sz="1600" b="1" i="0">
                 <a:solidFill>
                   <a:srgbClr val="FFFFFF"/>
                 </a:solidFill>
                 <a:latin typeface="Arial"/>
               </a:rPr>
               <a:t>Liquidity</a:t>
-            </a:r>
-          </a:p>
-        </p:txBody>
-      </p:sp>
-      <p:sp>
-        <p:nvSpPr>
-          <p:cNvPr id="10" name="TextBox 9"/>
-          <p:cNvSpPr txBox="1"/>
-          <p:nvPr/>
-        </p:nvSpPr>
-        <p:spPr>
-          <a:xfrm>
-            <a:off x="438912" y="2414016"/>
-            <a:ext cx="2103120" cy="1188720"/>
-          </a:xfrm>
-          <a:prstGeom prst="rect">
-            <a:avLst/>
-          </a:prstGeom>
-          <a:noFill/>
-        </p:spPr>
-        <p:txBody>
-          <a:bodyPr wrap="square">
-            <a:spAutoFit/>
-          </a:bodyPr>
-          <a:lstStyle/>
-          <a:p>
-            <a:pPr algn="ctr"/>
-            <a:r>
-              <a:rPr sz="1200" b="0" i="0">
-                <a:solidFill>
-                  <a:srgbClr val="FFFFFF"/>
-                </a:solidFill>
-                <a:latin typeface="Courier New"/>
-              </a:rPr>
-              <a:t>Live L2 book depth
-penalty — too thin
-to absorb order size</a:t>
-            </a:r>
-          </a:p>
-        </p:txBody>
-      </p:sp>
-      <p:sp>
-        <p:nvSpPr>
-          <p:cNvPr id="11" name="TextBox 10"/>
-          <p:cNvSpPr txBox="1"/>
-          <p:nvPr/>
-        </p:nvSpPr>
-        <p:spPr>
-          <a:xfrm>
-            <a:off x="438912" y="3767328"/>
-            <a:ext cx="2103120" cy="777240"/>
-          </a:xfrm>
-          <a:prstGeom prst="rect">
-            <a:avLst/>
-          </a:prstGeom>
-          <a:noFill/>
-        </p:spPr>
-        <p:txBody>
-          <a:bodyPr wrap="square">
-            <a:spAutoFit/>
-          </a:bodyPr>
-          <a:lstStyle/>
-          <a:p>
-            <a:pPr algn="ctr"/>
-            <a:r>
-              <a:rPr sz="1300" b="0" i="1">
-                <a:solidFill>
-                  <a:srgbClr val="FFFFAA"/>
-                </a:solidFill>
-                <a:latin typeface="Arial"/>
-              </a:rPr>
-              <a:t>"Can the book
-absorb our size?"</a:t>
-            </a:r>
-          </a:p>
-        </p:txBody>
-      </p:sp>
-      <p:sp>
-        <p:nvSpPr>
-          <p:cNvPr id="12" name="Rectangle 11"/>
-          <p:cNvSpPr/>
-          <p:nvPr/>
-        </p:nvSpPr>
-        <p:spPr>
-          <a:xfrm>
-            <a:off x="2816352" y="1298448"/>
-            <a:ext cx="2286000" cy="3657600"/>
-          </a:xfrm>
-          <a:prstGeom prst="rect">
-            <a:avLst/>
-          </a:prstGeom>
-          <a:solidFill>
-            <a:srgbClr val="CC0633"/>
-          </a:solidFill>
-          <a:ln>
-            <a:noFill/>
-          </a:ln>
-        </p:spPr>
-        <p:style>
-          <a:lnRef idx="1">
-            <a:schemeClr val="accent1"/>
-          </a:lnRef>
-          <a:fillRef idx="3">
-            <a:schemeClr val="accent1"/>
-          </a:fillRef>
-          <a:effectRef idx="2">
-            <a:schemeClr val="accent1"/>
-          </a:effectRef>
-          <a:fontRef idx="minor">
-            <a:schemeClr val="lt1"/>
-          </a:fontRef>
-        </p:style>
-        <p:txBody>
-          <a:bodyPr rtlCol="0" anchor="ctr"/>
-          <a:lstStyle/>
-          <a:p>
-            <a:pPr algn="ctr"/>
-          </a:p>
-        </p:txBody>
-      </p:sp>
-      <p:sp>
-        <p:nvSpPr>
-          <p:cNvPr id="13" name="TextBox 12"/>
-          <p:cNvSpPr txBox="1"/>
-          <p:nvPr/>
-        </p:nvSpPr>
-        <p:spPr>
-          <a:xfrm>
-            <a:off x="2907792" y="1389888"/>
-            <a:ext cx="2103120" cy="594360"/>
-          </a:xfrm>
-          <a:prstGeom prst="rect">
-            <a:avLst/>
-          </a:prstGeom>
-          <a:noFill/>
-        </p:spPr>
-        <p:txBody>
-          <a:bodyPr wrap="square">
-            <a:spAutoFit/>
-          </a:bodyPr>
-          <a:lstStyle/>
-          <a:p>
-            <a:pPr algn="ctr"/>
-            <a:r>
-              <a:rPr sz="2800" b="1" i="0">
-                <a:solidFill>
-                  <a:srgbClr val="FFFFFF"/>
-                </a:solidFill>
-                <a:latin typeface="Arial"/>
-              </a:rPr>
-              <a:t>h₂ ★</a:t>
-            </a:r>
-          </a:p>
-        </p:txBody>
-      </p:sp>
-      <p:sp>
-        <p:nvSpPr>
-          <p:cNvPr id="14" name="TextBox 13"/>
-          <p:cNvSpPr txBox="1"/>
-          <p:nvPr/>
-        </p:nvSpPr>
-        <p:spPr>
-          <a:xfrm>
-            <a:off x="2907792" y="1984248"/>
-            <a:ext cx="2103120" cy="411480"/>
-          </a:xfrm>
-          <a:prstGeom prst="rect">
-            <a:avLst/>
-          </a:prstGeom>
-          <a:noFill/>
-        </p:spPr>
-        <p:txBody>
-          <a:bodyPr wrap="square">
-            <a:spAutoFit/>
-          </a:bodyPr>
-          <a:lstStyle/>
-          <a:p>
-            <a:pPr algn="ctr"/>
-            <a:r>
-              <a:rPr sz="1700" b="1" i="0">
-                <a:solidFill>
-                  <a:srgbClr val="FFFFFF"/>
-                </a:solidFill>
-                <a:latin typeface="Arial"/>
-              </a:rPr>
-              <a:t>Slippage</a:t>
-            </a:r>
-          </a:p>
-        </p:txBody>
-      </p:sp>
-      <p:sp>
-        <p:nvSpPr>
-          <p:cNvPr id="15" name="TextBox 14"/>
-          <p:cNvSpPr txBox="1"/>
-          <p:nvPr/>
-        </p:nvSpPr>
-        <p:spPr>
-          <a:xfrm>
-            <a:off x="2907792" y="2414016"/>
-            <a:ext cx="2103120" cy="1188720"/>
-          </a:xfrm>
-          <a:prstGeom prst="rect">
-            <a:avLst/>
-          </a:prstGeom>
-          <a:noFill/>
-        </p:spPr>
-        <p:txBody>
-          <a:bodyPr wrap="square">
-            <a:spAutoFit/>
-          </a:bodyPr>
-          <a:lstStyle/>
-          <a:p>
-            <a:pPr algn="ctr"/>
-            <a:r>
-              <a:rPr sz="1200" b="0" i="0">
-                <a:solidFill>
-                  <a:srgbClr val="FFFFFF"/>
-                </a:solidFill>
-                <a:latin typeface="Courier New"/>
-              </a:rPr>
-              <a:t>VWAP penalty:
-pen = max(0, VWAP−mid)
-× order size</a:t>
-            </a:r>
-          </a:p>
-        </p:txBody>
-      </p:sp>
-      <p:sp>
-        <p:nvSpPr>
-          <p:cNvPr id="16" name="TextBox 15"/>
-          <p:cNvSpPr txBox="1"/>
-          <p:nvPr/>
-        </p:nvSpPr>
-        <p:spPr>
-          <a:xfrm>
-            <a:off x="2907792" y="3767328"/>
-            <a:ext cx="2103120" cy="777240"/>
-          </a:xfrm>
-          <a:prstGeom prst="rect">
-            <a:avLst/>
-          </a:prstGeom>
-          <a:noFill/>
-        </p:spPr>
-        <p:txBody>
-          <a:bodyPr wrap="square">
-            <a:spAutoFit/>
-          </a:bodyPr>
-          <a:lstStyle/>
-          <a:p>
-            <a:pPr algn="ctr"/>
-            <a:r>
-              <a:rPr sz="1300" b="0" i="1">
-                <a:solidFill>
-                  <a:srgbClr val="FFFFAA"/>
-                </a:solidFill>
-                <a:latin typeface="Arial"/>
-              </a:rPr>
-              <a:t>"Will my order
-move the price?"</a:t>
-            </a:r>
-          </a:p>
-        </p:txBody>
-      </p:sp>
-      <p:sp>
-        <p:nvSpPr>
-          <p:cNvPr id="17" name="Rectangle 16"/>
-          <p:cNvSpPr/>
-          <p:nvPr/>
-        </p:nvSpPr>
-        <p:spPr>
-          <a:xfrm>
-            <a:off x="5285232" y="1298448"/>
-            <a:ext cx="2286000" cy="3657600"/>
-          </a:xfrm>
-          <a:prstGeom prst="rect">
-            <a:avLst/>
-          </a:prstGeom>
-          <a:solidFill>
-            <a:srgbClr val="2E7D32"/>
-          </a:solidFill>
-          <a:ln>
-            <a:noFill/>
-          </a:ln>
-        </p:spPr>
-        <p:style>
-          <a:lnRef idx="1">
-            <a:schemeClr val="accent1"/>
-          </a:lnRef>
-          <a:fillRef idx="3">
-            <a:schemeClr val="accent1"/>
-          </a:fillRef>
-          <a:effectRef idx="2">
-            <a:schemeClr val="accent1"/>
-          </a:effectRef>
-          <a:fontRef idx="minor">
-            <a:schemeClr val="lt1"/>
-          </a:fontRef>
-        </p:style>
-        <p:txBody>
-          <a:bodyPr rtlCol="0" anchor="ctr"/>
-          <a:lstStyle/>
-          <a:p>
-            <a:pPr algn="ctr"/>
-          </a:p>
-        </p:txBody>
-      </p:sp>
-      <p:sp>
-        <p:nvSpPr>
-          <p:cNvPr id="18" name="TextBox 17"/>
-          <p:cNvSpPr txBox="1"/>
-          <p:nvPr/>
-        </p:nvSpPr>
-        <p:spPr>
-          <a:xfrm>
-            <a:off x="5376672" y="1389888"/>
-            <a:ext cx="2103120" cy="594360"/>
-          </a:xfrm>
-          <a:prstGeom prst="rect">
-            <a:avLst/>
-          </a:prstGeom>
-          <a:noFill/>
-        </p:spPr>
-        <p:txBody>
-          <a:bodyPr wrap="square">
-            <a:spAutoFit/>
-          </a:bodyPr>
-          <a:lstStyle/>
-          <a:p>
-            <a:pPr algn="ctr"/>
-            <a:r>
-              <a:rPr sz="2800" b="1" i="0">
-                <a:solidFill>
-                  <a:srgbClr val="FFFFFF"/>
-                </a:solidFill>
-                <a:latin typeface="Arial"/>
-              </a:rPr>
-              <a:t>h₃</a:t>
-            </a:r>
-          </a:p>
-        </p:txBody>
-      </p:sp>
-      <p:sp>
-        <p:nvSpPr>
-          <p:cNvPr id="19" name="TextBox 18"/>
-          <p:cNvSpPr txBox="1"/>
-          <p:nvPr/>
-        </p:nvSpPr>
-        <p:spPr>
-          <a:xfrm>
-            <a:off x="5376672" y="1984248"/>
-            <a:ext cx="2103120" cy="411480"/>
-          </a:xfrm>
-          <a:prstGeom prst="rect">
-            <a:avLst/>
-          </a:prstGeom>
-          <a:noFill/>
-        </p:spPr>
-        <p:txBody>
-          <a:bodyPr wrap="square">
-            <a:spAutoFit/>
-          </a:bodyPr>
-          <a:lstStyle/>
-          <a:p>
-            <a:pPr algn="ctr"/>
-            <a:r>
-              <a:rPr sz="1700" b="1" i="0">
-                <a:solidFill>
-                  <a:srgbClr val="FFFFFF"/>
-                </a:solidFill>
-                <a:latin typeface="Arial"/>
-              </a:rPr>
-              <a:t>Chain + Venue</a:t>
-            </a:r>
-          </a:p>
-        </p:txBody>
-      </p:sp>
-      <p:sp>
-        <p:nvSpPr>
-          <p:cNvPr id="20" name="TextBox 19"/>
-          <p:cNvSpPr txBox="1"/>
-          <p:nvPr/>
-        </p:nvSpPr>
-        <p:spPr>
-          <a:xfrm>
-            <a:off x="5376672" y="2414016"/>
-            <a:ext cx="2103120" cy="1188720"/>
-          </a:xfrm>
-          <a:prstGeom prst="rect">
-            <a:avLst/>
-          </a:prstGeom>
-          <a:noFill/>
-        </p:spPr>
-        <p:txBody>
-          <a:bodyPr wrap="square">
-            <a:spAutoFit/>
-          </a:bodyPr>
-          <a:lstStyle/>
-          <a:p>
-            <a:pPr algn="ctr"/>
-            <a:r>
-              <a:rPr sz="1200" b="0" i="0">
-                <a:solidFill>
-                  <a:srgbClr val="FFFFFF"/>
-                </a:solidFill>
-                <a:latin typeface="Courier New"/>
-              </a:rPr>
-              <a:t>On-chain settlement
-time penalty + venue
-reliability discount</a:t>
-            </a:r>
-          </a:p>
-        </p:txBody>
-      </p:sp>
-      <p:sp>
-        <p:nvSpPr>
-          <p:cNvPr id="21" name="TextBox 20"/>
-          <p:cNvSpPr txBox="1"/>
-          <p:nvPr/>
-        </p:nvSpPr>
-        <p:spPr>
-          <a:xfrm>
-            <a:off x="5376672" y="3767328"/>
-            <a:ext cx="2103120" cy="777240"/>
-          </a:xfrm>
-          <a:prstGeom prst="rect">
-            <a:avLst/>
-          </a:prstGeom>
-          <a:noFill/>
-        </p:spPr>
-        <p:txBody>
-          <a:bodyPr wrap="square">
-            <a:spAutoFit/>
-          </a:bodyPr>
-          <a:lstStyle/>
-          <a:p>
-            <a:pPr algn="ctr"/>
-            <a:r>
-              <a:rPr sz="1300" b="0" i="1">
-                <a:solidFill>
-                  <a:srgbClr val="FFFFAA"/>
-                </a:solidFill>
-                <a:latin typeface="Arial"/>
-              </a:rPr>
-              <a:t>"Will it settle
-in time?"</a:t>
-            </a:r>
-          </a:p>
-        </p:txBody>
-      </p:sp>
-      <p:sp>
-        <p:nvSpPr>
-          <p:cNvPr id="22" name="TextBox 21"/>
-          <p:cNvSpPr txBox="1"/>
-          <p:nvPr/>
-        </p:nvSpPr>
-        <p:spPr>
-          <a:xfrm>
-            <a:off x="7754112" y="1298448"/>
-            <a:ext cx="4090111" cy="320040"/>
-          </a:xfrm>
-          <a:prstGeom prst="rect">
-            <a:avLst/>
-          </a:prstGeom>
-          <a:noFill/>
-        </p:spPr>
-        <p:txBody>
-          <a:bodyPr wrap="square">
-            <a:spAutoFit/>
-          </a:bodyPr>
-          <a:lstStyle/>
-          <a:p>
-            <a:pPr algn="l"/>
-            <a:r>
-              <a:rPr sz="1400" b="1" i="0">
-                <a:solidFill>
-                  <a:srgbClr val="CC0633"/>
-                </a:solidFill>
-                <a:latin typeface="Arial"/>
-              </a:rPr>
-              <a:t>h₂ in detail:</a:t>
             </a:r>
           </a:p>
         </p:txBody>
       </p:sp>
       <p:pic>
         <p:nvPicPr>
-          <p:cNvPr id="23" name="Picture 22" descr="fin_slippage.png"/>
+          <p:cNvPr id="10" name="Picture 9" descr="fin_eq_h1.png"/>
           <p:cNvPicPr>
             <a:picLocks noChangeAspect="1"/>
           </p:cNvPicPr>
@@ -6980,7 +6500,556 @@
         </p:blipFill>
         <p:spPr>
           <a:xfrm>
-            <a:off x="7754112" y="1664208"/>
+            <a:off x="393192" y="2331720"/>
+            <a:ext cx="2194560" cy="952246"/>
+          </a:xfrm>
+          <a:prstGeom prst="rect">
+            <a:avLst/>
+          </a:prstGeom>
+        </p:spPr>
+      </p:pic>
+      <p:sp>
+        <p:nvSpPr>
+          <p:cNvPr id="11" name="TextBox 10"/>
+          <p:cNvSpPr txBox="1"/>
+          <p:nvPr/>
+        </p:nvSpPr>
+        <p:spPr>
+          <a:xfrm>
+            <a:off x="438912" y="3657600"/>
+            <a:ext cx="2103120" cy="640080"/>
+          </a:xfrm>
+          <a:prstGeom prst="rect">
+            <a:avLst/>
+          </a:prstGeom>
+          <a:noFill/>
+        </p:spPr>
+        <p:txBody>
+          <a:bodyPr wrap="square">
+            <a:spAutoFit/>
+          </a:bodyPr>
+          <a:lstStyle/>
+          <a:p>
+            <a:pPr algn="ctr"/>
+            <a:r>
+              <a:rPr sz="1200" b="0" i="1">
+                <a:solidFill>
+                  <a:srgbClr val="FFFFFF"/>
+                </a:solidFill>
+                <a:latin typeface="Arial"/>
+              </a:rPr>
+              <a:t>24h-volume scaled to
+order size and time</a:t>
+            </a:r>
+          </a:p>
+        </p:txBody>
+      </p:sp>
+      <p:sp>
+        <p:nvSpPr>
+          <p:cNvPr id="12" name="TextBox 11"/>
+          <p:cNvSpPr txBox="1"/>
+          <p:nvPr/>
+        </p:nvSpPr>
+        <p:spPr>
+          <a:xfrm>
+            <a:off x="438912" y="4343400"/>
+            <a:ext cx="2103120" cy="640080"/>
+          </a:xfrm>
+          <a:prstGeom prst="rect">
+            <a:avLst/>
+          </a:prstGeom>
+          <a:noFill/>
+        </p:spPr>
+        <p:txBody>
+          <a:bodyPr wrap="square">
+            <a:spAutoFit/>
+          </a:bodyPr>
+          <a:lstStyle/>
+          <a:p>
+            <a:pPr algn="ctr"/>
+            <a:r>
+              <a:rPr sz="1300" b="0" i="1">
+                <a:solidFill>
+                  <a:srgbClr val="FFFFAA"/>
+                </a:solidFill>
+                <a:latin typeface="Arial"/>
+              </a:rPr>
+              <a:t>"Can the book
+absorb our size?"</a:t>
+            </a:r>
+          </a:p>
+        </p:txBody>
+      </p:sp>
+      <p:sp>
+        <p:nvSpPr>
+          <p:cNvPr id="13" name="Rectangle 12"/>
+          <p:cNvSpPr/>
+          <p:nvPr/>
+        </p:nvSpPr>
+        <p:spPr>
+          <a:xfrm>
+            <a:off x="2816352" y="1234440"/>
+            <a:ext cx="2286000" cy="3840480"/>
+          </a:xfrm>
+          <a:prstGeom prst="rect">
+            <a:avLst/>
+          </a:prstGeom>
+          <a:solidFill>
+            <a:srgbClr val="CC0633"/>
+          </a:solidFill>
+          <a:ln>
+            <a:noFill/>
+          </a:ln>
+        </p:spPr>
+        <p:style>
+          <a:lnRef idx="1">
+            <a:schemeClr val="accent1"/>
+          </a:lnRef>
+          <a:fillRef idx="3">
+            <a:schemeClr val="accent1"/>
+          </a:fillRef>
+          <a:effectRef idx="2">
+            <a:schemeClr val="accent1"/>
+          </a:effectRef>
+          <a:fontRef idx="minor">
+            <a:schemeClr val="lt1"/>
+          </a:fontRef>
+        </p:style>
+        <p:txBody>
+          <a:bodyPr rtlCol="0" anchor="ctr"/>
+          <a:lstStyle/>
+          <a:p>
+            <a:pPr algn="ctr"/>
+          </a:p>
+        </p:txBody>
+      </p:sp>
+      <p:sp>
+        <p:nvSpPr>
+          <p:cNvPr id="14" name="TextBox 13"/>
+          <p:cNvSpPr txBox="1"/>
+          <p:nvPr/>
+        </p:nvSpPr>
+        <p:spPr>
+          <a:xfrm>
+            <a:off x="2907792" y="1325880"/>
+            <a:ext cx="2103120" cy="548640"/>
+          </a:xfrm>
+          <a:prstGeom prst="rect">
+            <a:avLst/>
+          </a:prstGeom>
+          <a:noFill/>
+        </p:spPr>
+        <p:txBody>
+          <a:bodyPr wrap="square">
+            <a:spAutoFit/>
+          </a:bodyPr>
+          <a:lstStyle/>
+          <a:p>
+            <a:pPr algn="ctr"/>
+            <a:r>
+              <a:rPr sz="2600" b="1" i="0">
+                <a:solidFill>
+                  <a:srgbClr val="FFFFFF"/>
+                </a:solidFill>
+                <a:latin typeface="Arial"/>
+              </a:rPr>
+              <a:t>h₂ ★</a:t>
+            </a:r>
+          </a:p>
+        </p:txBody>
+      </p:sp>
+      <p:sp>
+        <p:nvSpPr>
+          <p:cNvPr id="15" name="TextBox 14"/>
+          <p:cNvSpPr txBox="1"/>
+          <p:nvPr/>
+        </p:nvSpPr>
+        <p:spPr>
+          <a:xfrm>
+            <a:off x="2907792" y="1892808"/>
+            <a:ext cx="2103120" cy="365760"/>
+          </a:xfrm>
+          <a:prstGeom prst="rect">
+            <a:avLst/>
+          </a:prstGeom>
+          <a:noFill/>
+        </p:spPr>
+        <p:txBody>
+          <a:bodyPr wrap="square">
+            <a:spAutoFit/>
+          </a:bodyPr>
+          <a:lstStyle/>
+          <a:p>
+            <a:pPr algn="ctr"/>
+            <a:r>
+              <a:rPr sz="1600" b="1" i="0">
+                <a:solidFill>
+                  <a:srgbClr val="FFFFFF"/>
+                </a:solidFill>
+                <a:latin typeface="Arial"/>
+              </a:rPr>
+              <a:t>Slippage</a:t>
+            </a:r>
+          </a:p>
+        </p:txBody>
+      </p:sp>
+      <p:pic>
+        <p:nvPicPr>
+          <p:cNvPr id="16" name="Picture 15" descr="fin_eq_h2.png"/>
+          <p:cNvPicPr>
+            <a:picLocks noChangeAspect="1"/>
+          </p:cNvPicPr>
+          <p:nvPr/>
+        </p:nvPicPr>
+        <p:blipFill>
+          <a:blip r:embed="rId4"/>
+          <a:stretch>
+            <a:fillRect/>
+          </a:stretch>
+        </p:blipFill>
+        <p:spPr>
+          <a:xfrm>
+            <a:off x="2862072" y="2331720"/>
+            <a:ext cx="2194560" cy="1016000"/>
+          </a:xfrm>
+          <a:prstGeom prst="rect">
+            <a:avLst/>
+          </a:prstGeom>
+        </p:spPr>
+      </p:pic>
+      <p:sp>
+        <p:nvSpPr>
+          <p:cNvPr id="17" name="TextBox 16"/>
+          <p:cNvSpPr txBox="1"/>
+          <p:nvPr/>
+        </p:nvSpPr>
+        <p:spPr>
+          <a:xfrm>
+            <a:off x="2907792" y="3657600"/>
+            <a:ext cx="2103120" cy="640080"/>
+          </a:xfrm>
+          <a:prstGeom prst="rect">
+            <a:avLst/>
+          </a:prstGeom>
+          <a:noFill/>
+        </p:spPr>
+        <p:txBody>
+          <a:bodyPr wrap="square">
+            <a:spAutoFit/>
+          </a:bodyPr>
+          <a:lstStyle/>
+          <a:p>
+            <a:pPr algn="ctr"/>
+            <a:r>
+              <a:rPr sz="1200" b="0" i="1">
+                <a:solidFill>
+                  <a:srgbClr val="FFFFFF"/>
+                </a:solidFill>
+                <a:latin typeface="Arial"/>
+              </a:rPr>
+              <a:t>VWAP divergence from
+mid-quote, live L2</a:t>
+            </a:r>
+          </a:p>
+        </p:txBody>
+      </p:sp>
+      <p:sp>
+        <p:nvSpPr>
+          <p:cNvPr id="18" name="TextBox 17"/>
+          <p:cNvSpPr txBox="1"/>
+          <p:nvPr/>
+        </p:nvSpPr>
+        <p:spPr>
+          <a:xfrm>
+            <a:off x="2907792" y="4343400"/>
+            <a:ext cx="2103120" cy="640080"/>
+          </a:xfrm>
+          <a:prstGeom prst="rect">
+            <a:avLst/>
+          </a:prstGeom>
+          <a:noFill/>
+        </p:spPr>
+        <p:txBody>
+          <a:bodyPr wrap="square">
+            <a:spAutoFit/>
+          </a:bodyPr>
+          <a:lstStyle/>
+          <a:p>
+            <a:pPr algn="ctr"/>
+            <a:r>
+              <a:rPr sz="1300" b="0" i="1">
+                <a:solidFill>
+                  <a:srgbClr val="FFFFAA"/>
+                </a:solidFill>
+                <a:latin typeface="Arial"/>
+              </a:rPr>
+              <a:t>"Will my order
+move the price?"</a:t>
+            </a:r>
+          </a:p>
+        </p:txBody>
+      </p:sp>
+      <p:sp>
+        <p:nvSpPr>
+          <p:cNvPr id="19" name="Rectangle 18"/>
+          <p:cNvSpPr/>
+          <p:nvPr/>
+        </p:nvSpPr>
+        <p:spPr>
+          <a:xfrm>
+            <a:off x="5285232" y="1234440"/>
+            <a:ext cx="2286000" cy="3840480"/>
+          </a:xfrm>
+          <a:prstGeom prst="rect">
+            <a:avLst/>
+          </a:prstGeom>
+          <a:solidFill>
+            <a:srgbClr val="2E7D32"/>
+          </a:solidFill>
+          <a:ln>
+            <a:noFill/>
+          </a:ln>
+        </p:spPr>
+        <p:style>
+          <a:lnRef idx="1">
+            <a:schemeClr val="accent1"/>
+          </a:lnRef>
+          <a:fillRef idx="3">
+            <a:schemeClr val="accent1"/>
+          </a:fillRef>
+          <a:effectRef idx="2">
+            <a:schemeClr val="accent1"/>
+          </a:effectRef>
+          <a:fontRef idx="minor">
+            <a:schemeClr val="lt1"/>
+          </a:fontRef>
+        </p:style>
+        <p:txBody>
+          <a:bodyPr rtlCol="0" anchor="ctr"/>
+          <a:lstStyle/>
+          <a:p>
+            <a:pPr algn="ctr"/>
+          </a:p>
+        </p:txBody>
+      </p:sp>
+      <p:sp>
+        <p:nvSpPr>
+          <p:cNvPr id="20" name="TextBox 19"/>
+          <p:cNvSpPr txBox="1"/>
+          <p:nvPr/>
+        </p:nvSpPr>
+        <p:spPr>
+          <a:xfrm>
+            <a:off x="5376672" y="1325880"/>
+            <a:ext cx="2103120" cy="548640"/>
+          </a:xfrm>
+          <a:prstGeom prst="rect">
+            <a:avLst/>
+          </a:prstGeom>
+          <a:noFill/>
+        </p:spPr>
+        <p:txBody>
+          <a:bodyPr wrap="square">
+            <a:spAutoFit/>
+          </a:bodyPr>
+          <a:lstStyle/>
+          <a:p>
+            <a:pPr algn="ctr"/>
+            <a:r>
+              <a:rPr sz="2600" b="1" i="0">
+                <a:solidFill>
+                  <a:srgbClr val="FFFFFF"/>
+                </a:solidFill>
+                <a:latin typeface="Arial"/>
+              </a:rPr>
+              <a:t>h₃</a:t>
+            </a:r>
+          </a:p>
+        </p:txBody>
+      </p:sp>
+      <p:sp>
+        <p:nvSpPr>
+          <p:cNvPr id="21" name="TextBox 20"/>
+          <p:cNvSpPr txBox="1"/>
+          <p:nvPr/>
+        </p:nvSpPr>
+        <p:spPr>
+          <a:xfrm>
+            <a:off x="5376672" y="1892808"/>
+            <a:ext cx="2103120" cy="365760"/>
+          </a:xfrm>
+          <a:prstGeom prst="rect">
+            <a:avLst/>
+          </a:prstGeom>
+          <a:noFill/>
+        </p:spPr>
+        <p:txBody>
+          <a:bodyPr wrap="square">
+            <a:spAutoFit/>
+          </a:bodyPr>
+          <a:lstStyle/>
+          <a:p>
+            <a:pPr algn="ctr"/>
+            <a:r>
+              <a:rPr sz="1600" b="1" i="0">
+                <a:solidFill>
+                  <a:srgbClr val="FFFFFF"/>
+                </a:solidFill>
+                <a:latin typeface="Arial"/>
+              </a:rPr>
+              <a:t>Chain + Venue</a:t>
+            </a:r>
+          </a:p>
+        </p:txBody>
+      </p:sp>
+      <p:pic>
+        <p:nvPicPr>
+          <p:cNvPr id="22" name="Picture 21" descr="fin_eq_h3.png"/>
+          <p:cNvPicPr>
+            <a:picLocks noChangeAspect="1"/>
+          </p:cNvPicPr>
+          <p:nvPr/>
+        </p:nvPicPr>
+        <p:blipFill>
+          <a:blip r:embed="rId5"/>
+          <a:stretch>
+            <a:fillRect/>
+          </a:stretch>
+        </p:blipFill>
+        <p:spPr>
+          <a:xfrm>
+            <a:off x="5330952" y="2331720"/>
+            <a:ext cx="2194560" cy="1109226"/>
+          </a:xfrm>
+          <a:prstGeom prst="rect">
+            <a:avLst/>
+          </a:prstGeom>
+        </p:spPr>
+      </p:pic>
+      <p:sp>
+        <p:nvSpPr>
+          <p:cNvPr id="23" name="TextBox 22"/>
+          <p:cNvSpPr txBox="1"/>
+          <p:nvPr/>
+        </p:nvSpPr>
+        <p:spPr>
+          <a:xfrm>
+            <a:off x="5376672" y="3657600"/>
+            <a:ext cx="2103120" cy="640080"/>
+          </a:xfrm>
+          <a:prstGeom prst="rect">
+            <a:avLst/>
+          </a:prstGeom>
+          <a:noFill/>
+        </p:spPr>
+        <p:txBody>
+          <a:bodyPr wrap="square">
+            <a:spAutoFit/>
+          </a:bodyPr>
+          <a:lstStyle/>
+          <a:p>
+            <a:pPr algn="ctr"/>
+            <a:r>
+              <a:rPr sz="1200" b="0" i="1">
+                <a:solidFill>
+                  <a:srgbClr val="FFFFFF"/>
+                </a:solidFill>
+                <a:latin typeface="Arial"/>
+              </a:rPr>
+              <a:t>On-chain settlement
++ venue reliability</a:t>
+            </a:r>
+          </a:p>
+        </p:txBody>
+      </p:sp>
+      <p:sp>
+        <p:nvSpPr>
+          <p:cNvPr id="24" name="TextBox 23"/>
+          <p:cNvSpPr txBox="1"/>
+          <p:nvPr/>
+        </p:nvSpPr>
+        <p:spPr>
+          <a:xfrm>
+            <a:off x="5376672" y="4343400"/>
+            <a:ext cx="2103120" cy="640080"/>
+          </a:xfrm>
+          <a:prstGeom prst="rect">
+            <a:avLst/>
+          </a:prstGeom>
+          <a:noFill/>
+        </p:spPr>
+        <p:txBody>
+          <a:bodyPr wrap="square">
+            <a:spAutoFit/>
+          </a:bodyPr>
+          <a:lstStyle/>
+          <a:p>
+            <a:pPr algn="ctr"/>
+            <a:r>
+              <a:rPr sz="1300" b="0" i="1">
+                <a:solidFill>
+                  <a:srgbClr val="FFFFAA"/>
+                </a:solidFill>
+                <a:latin typeface="Arial"/>
+              </a:rPr>
+              <a:t>"Will it settle
+in time?"</a:t>
+            </a:r>
+          </a:p>
+        </p:txBody>
+      </p:sp>
+      <p:sp>
+        <p:nvSpPr>
+          <p:cNvPr id="25" name="TextBox 24"/>
+          <p:cNvSpPr txBox="1"/>
+          <p:nvPr/>
+        </p:nvSpPr>
+        <p:spPr>
+          <a:xfrm>
+            <a:off x="7754112" y="1234440"/>
+            <a:ext cx="4090111" cy="320040"/>
+          </a:xfrm>
+          <a:prstGeom prst="rect">
+            <a:avLst/>
+          </a:prstGeom>
+          <a:noFill/>
+        </p:spPr>
+        <p:txBody>
+          <a:bodyPr wrap="square">
+            <a:spAutoFit/>
+          </a:bodyPr>
+          <a:lstStyle/>
+          <a:p>
+            <a:pPr algn="l"/>
+            <a:r>
+              <a:rPr sz="1400" b="1" i="0">
+                <a:solidFill>
+                  <a:srgbClr val="CC0633"/>
+                </a:solidFill>
+                <a:latin typeface="Arial"/>
+              </a:rPr>
+              <a:t>h₂ in detail:</a:t>
+            </a:r>
+          </a:p>
+        </p:txBody>
+      </p:sp>
+      <p:pic>
+        <p:nvPicPr>
+          <p:cNvPr id="26" name="Picture 25" descr="fin_slippage.png"/>
+          <p:cNvPicPr>
+            <a:picLocks noChangeAspect="1"/>
+          </p:cNvPicPr>
+          <p:nvPr/>
+        </p:nvPicPr>
+        <p:blipFill>
+          <a:blip r:embed="rId6"/>
+          <a:stretch>
+            <a:fillRect/>
+          </a:stretch>
+        </p:blipFill>
+        <p:spPr>
+          <a:xfrm>
+            <a:off x="7754112" y="1600200"/>
             <a:ext cx="3998671" cy="2849769"/>
           </a:xfrm>
           <a:prstGeom prst="rect">
@@ -6990,14 +7059,14 @@
       </p:pic>
       <p:sp>
         <p:nvSpPr>
-          <p:cNvPr id="24" name="TextBox 23"/>
-          <p:cNvSpPr txBox="1"/>
-          <p:nvPr/>
-        </p:nvSpPr>
-        <p:spPr>
-          <a:xfrm>
-            <a:off x="347472" y="5120640"/>
-            <a:ext cx="11496751" cy="365760"/>
+          <p:cNvPr id="27" name="TextBox 26"/>
+          <p:cNvSpPr txBox="1"/>
+          <p:nvPr/>
+        </p:nvSpPr>
+        <p:spPr>
+          <a:xfrm>
+            <a:off x="347472" y="5166360"/>
+            <a:ext cx="11496751" cy="274320"/>
           </a:xfrm>
           <a:prstGeom prst="rect">
             <a:avLst/>
@@ -7012,7 +7081,42 @@
           <a:p>
             <a:pPr algn="ctr"/>
             <a:r>
-              <a:rPr sz="1600" b="1" i="1">
+              <a:rPr sz="1000" b="0" i="1">
+                <a:solidFill>
+                  <a:srgbClr val="888888"/>
+                </a:solidFill>
+                <a:latin typeface="Arial"/>
+              </a:rPr>
+              <a:t>Paper notation: h₃ here = h₄ in paper §4.4.  h₃ in the paper is the multi-start search strategy (§4.3).</a:t>
+            </a:r>
+          </a:p>
+        </p:txBody>
+      </p:sp>
+      <p:sp>
+        <p:nvSpPr>
+          <p:cNvPr id="28" name="TextBox 27"/>
+          <p:cNvSpPr txBox="1"/>
+          <p:nvPr/>
+        </p:nvSpPr>
+        <p:spPr>
+          <a:xfrm>
+            <a:off x="347472" y="5458968"/>
+            <a:ext cx="11496751" cy="320040"/>
+          </a:xfrm>
+          <a:prstGeom prst="rect">
+            <a:avLst/>
+          </a:prstGeom>
+          <a:noFill/>
+        </p:spPr>
+        <p:txBody>
+          <a:bodyPr wrap="square">
+            <a:spAutoFit/>
+          </a:bodyPr>
+          <a:lstStyle/>
+          <a:p>
+            <a:pPr algn="ctr"/>
+            <a:r>
+              <a:rPr sz="1500" b="1" i="1">
                 <a:solidFill>
                   <a:srgbClr val="CC0633"/>
                 </a:solidFill>
@@ -7025,7 +7129,7 @@
       </p:sp>
       <p:sp>
         <p:nvSpPr>
-          <p:cNvPr id="25" name="Rectangle 24"/>
+          <p:cNvPr id="29" name="Rectangle 28"/>
           <p:cNvSpPr/>
           <p:nvPr/>
         </p:nvSpPr>
@@ -7068,7 +7172,7 @@
       </p:sp>
       <p:sp>
         <p:nvSpPr>
-          <p:cNvPr id="26" name="TextBox 25"/>
+          <p:cNvPr id="30" name="TextBox 29"/>
           <p:cNvSpPr txBox="1"/>
           <p:nvPr/>
         </p:nvSpPr>
@@ -7103,7 +7207,7 @@
       </p:sp>
       <p:sp>
         <p:nvSpPr>
-          <p:cNvPr id="27" name="TextBox 26"/>
+          <p:cNvPr id="31" name="TextBox 30"/>
           <p:cNvSpPr txBox="1"/>
           <p:nvPr/>
         </p:nvSpPr>
@@ -7138,7 +7242,7 @@
       </p:sp>
       <p:sp>
         <p:nvSpPr>
-          <p:cNvPr id="28" name="TextBox 27"/>
+          <p:cNvPr id="32" name="TextBox 31"/>
           <p:cNvSpPr txBox="1"/>
           <p:nvPr/>
         </p:nvSpPr>
